--- a/DBTUNING/ch21_통계수집_히스토그램확장시스템/ch21_통계수집_히스토그램과확장통계.pptx
+++ b/DBTUNING/ch21_통계수집_히스토그램확장시스템/ch21_통계수집_히스토그램과확장통계.pptx
@@ -5311,7 +5311,7 @@
                 </a:solidFill>
                 <a:latin typeface="맑은 고딕"/>
               </a:rPr>
-              <a:t>제7장</a:t>
+              <a:t>제ch21</a:t>
             </a:r>
           </a:p>
         </p:txBody>

--- a/DBTUNING/ch21_통계수집_히스토그램확장시스템/ch21_통계수집_히스토그램과확장통계.pptx
+++ b/DBTUNING/ch21_통계수집_히스토그램확장시스템/ch21_통계수집_히스토그램과확장통계.pptx
@@ -5311,7 +5311,7 @@
                 </a:solidFill>
                 <a:latin typeface="맑은 고딕"/>
               </a:rPr>
-              <a:t>제ch21</a:t>
+              <a:t>ch21</a:t>
             </a:r>
           </a:p>
         </p:txBody>

--- a/DBTUNING/ch21_통계수집_히스토그램확장시스템/ch21_통계수집_히스토그램과확장통계.pptx
+++ b/DBTUNING/ch21_통계수집_히스토그램확장시스템/ch21_통계수집_히스토그램과확장통계.pptx
@@ -5655,7 +5655,7 @@
                 </a:solidFill>
                 <a:latin typeface="맑은 고딕"/>
               </a:rPr>
-              <a:t>7.3</a:t>
+              <a:t>21.3</a:t>
             </a:r>
           </a:p>
         </p:txBody>
@@ -6737,7 +6737,7 @@
                 </a:solidFill>
                 <a:latin typeface="맑은 고딕"/>
               </a:rPr>
-              <a:t>7.4</a:t>
+              <a:t>21.4</a:t>
             </a:r>
           </a:p>
         </p:txBody>
@@ -8444,7 +8444,7 @@
                 </a:solidFill>
                 <a:latin typeface="맑은 고딕"/>
               </a:rPr>
-              <a:t>7.5</a:t>
+              <a:t>21.5</a:t>
             </a:r>
           </a:p>
         </p:txBody>
@@ -9574,7 +9574,7 @@
                 </a:solidFill>
                 <a:latin typeface="맑은 고딕"/>
               </a:rPr>
-              <a:t>7.6</a:t>
+              <a:t>21.6</a:t>
             </a:r>
           </a:p>
         </p:txBody>
@@ -10688,7 +10688,7 @@
                 </a:solidFill>
                 <a:latin typeface="맑은 고딕"/>
               </a:rPr>
-              <a:t>7.7</a:t>
+              <a:t>21.7</a:t>
             </a:r>
           </a:p>
         </p:txBody>
@@ -11355,7 +11355,7 @@
                 </a:solidFill>
                 <a:latin typeface="맑은 고딕"/>
               </a:rPr>
-              <a:t>•  7.2  히스토그램 — 편중된 데이터에서 옵티마이저를 구한다</a:t>
+              <a:t>•  21.2  히스토그램 — 편중된 데이터에서 옵티마이저를 구한다</a:t>
             </a:r>
           </a:p>
           <a:p>
@@ -11371,7 +11371,7 @@
                 </a:solidFill>
                 <a:latin typeface="맑은 고딕"/>
               </a:rPr>
-              <a:t>•  7.3  METHOD_OPT — 어떤 컬럼에 히스토그램을 만들지 결정</a:t>
+              <a:t>•  21.3  METHOD_OPT — 어떤 컬럼에 히스토그램을 만들지 결정</a:t>
             </a:r>
           </a:p>
           <a:p>
@@ -11387,7 +11387,7 @@
                 </a:solidFill>
                 <a:latin typeface="맑은 고딕"/>
               </a:rPr>
-              <a:t>•  7.4  확장 통계 — 컬럼 그룹과 표현식</a:t>
+              <a:t>•  21.4  확장 통계 — 컬럼 그룹과 표현식</a:t>
             </a:r>
           </a:p>
           <a:p>
@@ -11403,7 +11403,7 @@
                 </a:solidFill>
                 <a:latin typeface="맑은 고딕"/>
               </a:rPr>
-              <a:t>•  7.5  시스템 통계 — 하드웨어를 옵티마이저에게 알린다</a:t>
+              <a:t>•  21.5  시스템 통계 — 하드웨어를 옵티마이저에게 알린다</a:t>
             </a:r>
           </a:p>
           <a:p>
@@ -11419,7 +11419,7 @@
                 </a:solidFill>
                 <a:latin typeface="맑은 고딕"/>
               </a:rPr>
-              <a:t>•  7.6  통계 Preferences — 수집 정책을 계층으로 관리 (ADMIN 33장 심화)</a:t>
+              <a:t>•  21.6  통계 Preferences — 수집 정책을 계층으로 관리 (ADMIN 33장 심화)</a:t>
             </a:r>
           </a:p>
           <a:p>
@@ -11435,7 +11435,7 @@
                 </a:solidFill>
                 <a:latin typeface="맑은 고딕"/>
               </a:rPr>
-              <a:t>•  7.7  Optimizer Statistics Advisor — 통계 운영 자동 점검 (ADMIN 33장 심화)</a:t>
+              <a:t>•  21.7  Optimizer Statistics Advisor — 통계 운영 자동 점검 (ADMIN 33장 심화)</a:t>
             </a:r>
           </a:p>
           <a:p>
@@ -11451,7 +11451,7 @@
                 </a:solidFill>
                 <a:latin typeface="맑은 고딕"/>
               </a:rPr>
-              <a:t>•  7.8  흔한 함정 — 전체 재수집을 만능으로 여기지 않는다</a:t>
+              <a:t>•  21.8  흔한 함정 — 전체 재수집을 만능으로 여기지 않는다</a:t>
             </a:r>
           </a:p>
           <a:p>
@@ -11811,7 +11811,7 @@
                 </a:solidFill>
                 <a:latin typeface="맑은 고딕"/>
               </a:rPr>
-              <a:t>7.8</a:t>
+              <a:t>21.8</a:t>
             </a:r>
           </a:p>
         </p:txBody>
@@ -13017,7 +13017,7 @@
                 </a:solidFill>
                 <a:latin typeface="맑은 고딕"/>
               </a:rPr>
-              <a:t>7.2</a:t>
+              <a:t>21.2</a:t>
             </a:r>
           </a:p>
         </p:txBody>
